--- a/Schools_ML_Track/camp_2026/slides/ML/F04.pptx
+++ b/Schools_ML_Track/camp_2026/slides/ML/F04.pptx
@@ -119,7 +119,7 @@
   <p:extLst>
     <p:ext uri="{521415D9-36F7-43E2-AB2F-B90AF26B5E84}">
       <p14:sectionLst xmlns:p14="http://schemas.microsoft.com/office/powerpoint/2010/main">
-        <p14:section name="Opening" id="{8f699ed1-92dc-e5d8-cbc5-9a56c08e2b18}">
+        <p14:section name="Opening" id="{7ef0b235-cb45-86fb-88c2-6efbefbabb0d}">
           <p14:sldIdLst>
             <p14:sldId id="256"/>
             <p14:sldId id="257"/>
@@ -128,7 +128,7 @@
             <p14:sldId id="260"/>
           </p14:sldIdLst>
         </p14:section>
-        <p14:section name="Block A" id="{a54959e3-f7c5-8387-bbbd-c96f3b3c7caf}">
+        <p14:section name="Block A" id="{d2713ae6-fce3-9c81-2394-413c1de26fd8}">
           <p14:sldIdLst>
             <p14:sldId id="261"/>
             <p14:sldId id="262"/>
@@ -137,7 +137,7 @@
             <p14:sldId id="265"/>
           </p14:sldIdLst>
         </p14:section>
-        <p14:section name="Make and close" id="{44812120-87e2-1cc7-7db2-a9d3de8161aa}">
+        <p14:section name="Make and close" id="{a4e2a00b-1e30-12c6-2f0e-b334e6bace46}">
           <p14:sldIdLst>
             <p14:sldId id="266"/>
             <p14:sldId id="267"/>

--- a/Schools_ML_Track/camp_2026/slides/ML/F04.pptx
+++ b/Schools_ML_Track/camp_2026/slides/ML/F04.pptx
@@ -119,7 +119,7 @@
   <p:extLst>
     <p:ext uri="{521415D9-36F7-43E2-AB2F-B90AF26B5E84}">
       <p14:sectionLst xmlns:p14="http://schemas.microsoft.com/office/powerpoint/2010/main">
-        <p14:section name="Opening" id="{7ef0b235-cb45-86fb-88c2-6efbefbabb0d}">
+        <p14:section name="Opening" id="{153f576e-a36b-701c-2ac7-16e077b2794b}">
           <p14:sldIdLst>
             <p14:sldId id="256"/>
             <p14:sldId id="257"/>
@@ -128,7 +128,7 @@
             <p14:sldId id="260"/>
           </p14:sldIdLst>
         </p14:section>
-        <p14:section name="Block A" id="{d2713ae6-fce3-9c81-2394-413c1de26fd8}">
+        <p14:section name="Block A" id="{2d7f0c50-9797-deda-8de4-e3c02756605a}">
           <p14:sldIdLst>
             <p14:sldId id="261"/>
             <p14:sldId id="262"/>
@@ -137,7 +137,7 @@
             <p14:sldId id="265"/>
           </p14:sldIdLst>
         </p14:section>
-        <p14:section name="Make and close" id="{a4e2a00b-1e30-12c6-2f0e-b334e6bace46}">
+        <p14:section name="Make and close" id="{52ae4c4f-4543-09e8-9b9f-11a38df0a946}">
           <p14:sldIdLst>
             <p14:sldId id="266"/>
             <p14:sldId id="267"/>
@@ -2362,7 +2362,24 @@
                 <a:ea typeface="Lato" pitchFamily="34" charset="-122"/>
                 <a:cs typeface="Lato" pitchFamily="34" charset="-120"/>
               </a:rPr>
-              <a:t>Matrices, weighted sums and slope</a:t>
+              <a:t>Matrices, weighted</a:t>
+            </a:r>
+            <a:endParaRPr lang="en-US" sz="5600" dirty="0"/>
+          </a:p>
+          <a:p>
+            <a:pPr algn="l" indent="0" marL="0">
+              <a:buNone/>
+            </a:pPr>
+            <a:r>
+              <a:rPr lang="en-US" sz="5600" b="1" dirty="0">
+                <a:solidFill>
+                  <a:srgbClr val="FFFFFF"/>
+                </a:solidFill>
+                <a:latin typeface="Lato" pitchFamily="34" charset="0"/>
+                <a:ea typeface="Lato" pitchFamily="34" charset="-122"/>
+                <a:cs typeface="Lato" pitchFamily="34" charset="-120"/>
+              </a:rPr>
+              <a:t>sums and slope</a:t>
             </a:r>
             <a:endParaRPr lang="en-US" sz="5600" dirty="0"/>
           </a:p>
@@ -2790,15 +2807,15 @@
           <a:p>
             <a:pPr algn="l" indent="0" marL="0">
               <a:lnSpc>
-                <a:spcPts val="3480"/>
+                <a:spcPts val="2760"/>
               </a:lnSpc>
               <a:spcAft>
-                <a:spcPts val="2520"/>
+                <a:spcPts val="2020"/>
               </a:spcAft>
               <a:buNone/>
             </a:pPr>
             <a:r>
-              <a:rPr lang="en-US" sz="2900" dirty="0">
+              <a:rPr lang="en-US" sz="2300" dirty="0">
                 <a:solidFill>
                   <a:srgbClr val="111111"/>
                 </a:solidFill>
@@ -2806,22 +2823,22 @@
                 <a:ea typeface="Lato" pitchFamily="34" charset="-122"/>
                 <a:cs typeface="Lato" pitchFamily="34" charset="-120"/>
               </a:rPr>
-              <a:t>Add the home [50, 2] as a third row. Predict its result on paper before you run. State the new shape and what each weight means. Explain why these numbers say nothing about real rents in Kampala. Save F04.ipynb.</a:t>
-            </a:r>
-            <a:endParaRPr lang="en-US" sz="2900" dirty="0"/>
+              <a:t>Add the home [50, 2] as a third row.</a:t>
+            </a:r>
+            <a:endParaRPr lang="en-US" sz="2300" dirty="0"/>
           </a:p>
           <a:p>
             <a:pPr algn="l" indent="0" marL="0">
               <a:lnSpc>
-                <a:spcPts val="3480"/>
+                <a:spcPts val="2760"/>
               </a:lnSpc>
               <a:spcAft>
-                <a:spcPts val="2520"/>
+                <a:spcPts val="2020"/>
               </a:spcAft>
               <a:buNone/>
             </a:pPr>
             <a:r>
-              <a:rPr lang="en-US" sz="2900" dirty="0">
+              <a:rPr lang="en-US" sz="2300" dirty="0">
                 <a:solidFill>
                   <a:srgbClr val="111111"/>
                 </a:solidFill>
@@ -2829,9 +2846,101 @@
                 <a:ea typeface="Lato" pitchFamily="34" charset="-122"/>
                 <a:cs typeface="Lato" pitchFamily="34" charset="-120"/>
               </a:rPr>
-              <a:t>Save it as F04. Write two sentences: what you changed and how you checked it.</a:t>
-            </a:r>
-            <a:endParaRPr lang="en-US" sz="2900" dirty="0"/>
+              <a:t>Predict its result on paper before you run.</a:t>
+            </a:r>
+            <a:endParaRPr lang="en-US" sz="2300" dirty="0"/>
+          </a:p>
+          <a:p>
+            <a:pPr algn="l" indent="0" marL="0">
+              <a:lnSpc>
+                <a:spcPts val="2760"/>
+              </a:lnSpc>
+              <a:spcAft>
+                <a:spcPts val="2020"/>
+              </a:spcAft>
+              <a:buNone/>
+            </a:pPr>
+            <a:r>
+              <a:rPr lang="en-US" sz="2300" dirty="0">
+                <a:solidFill>
+                  <a:srgbClr val="111111"/>
+                </a:solidFill>
+                <a:latin typeface="Lato" pitchFamily="34" charset="0"/>
+                <a:ea typeface="Lato" pitchFamily="34" charset="-122"/>
+                <a:cs typeface="Lato" pitchFamily="34" charset="-120"/>
+              </a:rPr>
+              <a:t>State the new shape and what each weight means.</a:t>
+            </a:r>
+            <a:endParaRPr lang="en-US" sz="2300" dirty="0"/>
+          </a:p>
+          <a:p>
+            <a:pPr algn="l" indent="0" marL="0">
+              <a:lnSpc>
+                <a:spcPts val="2760"/>
+              </a:lnSpc>
+              <a:spcAft>
+                <a:spcPts val="2020"/>
+              </a:spcAft>
+              <a:buNone/>
+            </a:pPr>
+            <a:r>
+              <a:rPr lang="en-US" sz="2300" dirty="0">
+                <a:solidFill>
+                  <a:srgbClr val="111111"/>
+                </a:solidFill>
+                <a:latin typeface="Lato" pitchFamily="34" charset="0"/>
+                <a:ea typeface="Lato" pitchFamily="34" charset="-122"/>
+                <a:cs typeface="Lato" pitchFamily="34" charset="-120"/>
+              </a:rPr>
+              <a:t>Explain why these numbers say nothing about real rents in Kampala.</a:t>
+            </a:r>
+            <a:endParaRPr lang="en-US" sz="2300" dirty="0"/>
+          </a:p>
+          <a:p>
+            <a:pPr algn="l" indent="0" marL="0">
+              <a:lnSpc>
+                <a:spcPts val="2760"/>
+              </a:lnSpc>
+              <a:spcAft>
+                <a:spcPts val="2020"/>
+              </a:spcAft>
+              <a:buNone/>
+            </a:pPr>
+            <a:r>
+              <a:rPr lang="en-US" sz="2300" dirty="0">
+                <a:solidFill>
+                  <a:srgbClr val="111111"/>
+                </a:solidFill>
+                <a:latin typeface="Lato" pitchFamily="34" charset="0"/>
+                <a:ea typeface="Lato" pitchFamily="34" charset="-122"/>
+                <a:cs typeface="Lato" pitchFamily="34" charset="-120"/>
+              </a:rPr>
+              <a:t>Save F04.ipynb.</a:t>
+            </a:r>
+            <a:endParaRPr lang="en-US" sz="2300" dirty="0"/>
+          </a:p>
+          <a:p>
+            <a:pPr algn="l" indent="0" marL="0">
+              <a:lnSpc>
+                <a:spcPts val="2760"/>
+              </a:lnSpc>
+              <a:spcAft>
+                <a:spcPts val="2020"/>
+              </a:spcAft>
+              <a:buNone/>
+            </a:pPr>
+            <a:r>
+              <a:rPr lang="en-US" sz="2300" dirty="0">
+                <a:solidFill>
+                  <a:srgbClr val="111111"/>
+                </a:solidFill>
+                <a:latin typeface="Lato" pitchFamily="34" charset="0"/>
+                <a:ea typeface="Lato" pitchFamily="34" charset="-122"/>
+                <a:cs typeface="Lato" pitchFamily="34" charset="-120"/>
+              </a:rPr>
+              <a:t>Write two sentences: what you changed and how you checked it.</a:t>
+            </a:r>
+            <a:endParaRPr lang="en-US" sz="2300" dirty="0"/>
           </a:p>
         </p:txBody>
       </p:sp>
